--- a/docs/weeks/week01.pptx
+++ b/docs/weeks/week01.pptx
@@ -12,7 +12,6 @@
     <p:sldId id="260" r:id="rId6"/>
     <p:sldId id="261" r:id="rId7"/>
     <p:sldId id="262" r:id="rId8"/>
-    <p:sldId id="263" r:id="rId9"/>
   </p:sldIdLst>
   <p:sldSz cx="9144000" cy="5143500" type="screen16x9"/>
   <p:notesSz cx="6858000" cy="9144000"/>
@@ -3644,57 +3643,6 @@
 </file>
 
 <file path=ppt/slides/slide7.xml><?xml version="1.0" encoding="utf-8"?>
-<p:sld xmlns:a="http://schemas.openxmlformats.org/drawingml/2006/main" xmlns:r="http://schemas.openxmlformats.org/officeDocument/2006/relationships" xmlns:p="http://schemas.openxmlformats.org/presentationml/2006/main">
-  <p:cSld>
-    <p:spTree>
-      <p:nvGrpSpPr>
-        <p:cNvPr id="1" name=""/>
-        <p:cNvGrpSpPr/>
-        <p:nvPr/>
-      </p:nvGrpSpPr>
-      <p:grpSpPr>
-        <a:xfrm>
-          <a:off x="0" y="0"/>
-          <a:ext cx="0" cy="0"/>
-          <a:chOff x="0" y="0"/>
-          <a:chExt cx="0" cy="0"/>
-        </a:xfrm>
-      </p:grpSpPr>
-      <p:sp>
-        <p:nvSpPr>
-          <p:cNvPr id="2" name="Title 1"/>
-          <p:cNvSpPr>
-            <a:spLocks noGrp="1"/>
-          </p:cNvSpPr>
-          <p:nvPr>
-            <p:ph type="title"/>
-          </p:nvPr>
-        </p:nvSpPr>
-        <p:spPr/>
-        <p:txBody>
-          <a:bodyPr/>
-          <a:lstStyle/>
-          <a:p>
-            <a:pPr lvl="0" indent="0" marL="0">
-              <a:buNone/>
-            </a:pPr>
-            <a:r>
-              <a:rPr b="1"/>
-              <a:t>Next up</a:t>
-            </a:r>
-            <a:r>
-              <a:rPr/>
-              <a:t>: Week 2</a:t>
-            </a:r>
-          </a:p>
-        </p:txBody>
-      </p:sp>
-    </p:spTree>
-  </p:cSld>
-</p:sld>
-</file>
-
-<file path=ppt/slides/slide8.xml><?xml version="1.0" encoding="utf-8"?>
 <p:sld xmlns:a="http://schemas.openxmlformats.org/drawingml/2006/main" xmlns:r="http://schemas.openxmlformats.org/officeDocument/2006/relationships" xmlns:p="http://schemas.openxmlformats.org/presentationml/2006/main">
   <p:cSld>
     <p:spTree>

--- a/docs/weeks/week01.pptx
+++ b/docs/weeks/week01.pptx
@@ -3121,7 +3121,7 @@
             </a:pPr>
             <a:r>
               <a:rPr/>
-              <a:t>DATA 202 - Module 1</a:t>
+              <a:t>DATA 202 - Week 1</a:t>
             </a:r>
           </a:p>
         </p:txBody>
